--- a/addons/amunet_label/static/templates/PLANTILLA_H.pptx
+++ b/addons/amunet_label/static/templates/PLANTILLA_H.pptx
@@ -3661,7 +3661,7 @@
           </p:nvGrpSpPr>
           <p:grpSpPr>
             <a:xfrm>
-              <a:off x="359281" y="2311246"/>
+              <a:off x="359281" y="2114307"/>
               <a:ext cx="2960145" cy="319765"/>
               <a:chOff x="371981" y="2108046"/>
               <a:chExt cx="2960145" cy="319765"/>
@@ -4214,6 +4214,51 @@
           </p:sp>
         </p:grpSp>
       </p:grpSp>
+      <p:sp>
+        <p:nvSpPr>
+          <p:cNvPr id="4" name="CuadroTexto 4826">
+            <a:extLst>
+              <a:ext uri="{FF2B5EF4-FFF2-40B4-BE49-F238E27FC236}">
+                <a16:creationId xmlns:a16="http://schemas.microsoft.com/office/drawing/2014/main" id="{FF883CFB-9D76-35A8-A36E-6F32B1FBC351}"/>
+              </a:ext>
+            </a:extLst>
+          </p:cNvPr>
+          <p:cNvSpPr txBox="1"/>
+          <p:nvPr/>
+        </p:nvSpPr>
+        <p:spPr>
+          <a:xfrm>
+            <a:off x="605526" y="2440807"/>
+            <a:ext cx="2366480" cy="246221"/>
+          </a:xfrm>
+          <a:prstGeom prst="rect">
+            <a:avLst/>
+          </a:prstGeom>
+          <a:noFill/>
+        </p:spPr>
+        <p:txBody>
+          <a:bodyPr wrap="square" rtlCol="0">
+            <a:spAutoFit/>
+          </a:bodyPr>
+          <a:lstStyle/>
+          <a:p>
+            <a:pPr algn="ctr"/>
+            <a:r>
+              <a:rPr lang="es-MX" sz="1000" spc="4" dirty="0">
+                <a:solidFill>
+                  <a:srgbClr val="002060"/>
+                </a:solidFill>
+                <a:latin typeface="Now"/>
+                <a:ea typeface="Now"/>
+                <a:cs typeface="Now"/>
+                <a:sym typeface="Now"/>
+              </a:rPr>
+              <a:t>Registro Sanitario: {{REG_SANITARIO}}</a:t>
+            </a:r>
+            <a:endParaRPr lang="es-MX" sz="1400" dirty="0"/>
+          </a:p>
+        </p:txBody>
+      </p:sp>
     </p:spTree>
     <p:extLst>
       <p:ext uri="{BB962C8B-B14F-4D97-AF65-F5344CB8AC3E}">
